--- a/chat_course/week08_server_refactor/Week08_서버리팩터링.pptx
+++ b/chat_course/week08_server_refactor/Week08_서버리팩터링.pptx
@@ -4386,7 +4386,13 @@
           <p:cNvGraphicFramePr>
             <a:graphicFrameLocks noGrp="1"/>
           </p:cNvGraphicFramePr>
-          <p:nvPr/>
+          <p:nvPr>
+            <p:extLst>
+              <p:ext uri="{D42A27DB-BD31-4B8C-83A1-F6EECF244321}">
+                <p14:modId xmlns:p14="http://schemas.microsoft.com/office/powerpoint/2010/main" val="162589994"/>
+              </p:ext>
+            </p:extLst>
+          </p:nvPr>
         </p:nvGraphicFramePr>
         <p:xfrm>
           <a:off x="685800" y="1600200"/>
@@ -4452,13 +4458,22 @@
                     <a:p>
                       <a:pPr algn="l"/>
                       <a:r>
-                        <a:rPr sz="1600" b="1">
+                        <a:rPr sz="1600" b="1" dirty="0" err="1">
                           <a:solidFill>
                             <a:srgbClr val="FFFFFF"/>
                           </a:solidFill>
                           <a:latin typeface="맑은 고딕"/>
                         </a:rPr>
-                        <a:t>팩토리 (Factory)</a:t>
+                        <a:t>팩토리</a:t>
+                      </a:r>
+                      <a:r>
+                        <a:rPr sz="1600" b="1" dirty="0">
+                          <a:solidFill>
+                            <a:srgbClr val="FFFFFF"/>
+                          </a:solidFill>
+                          <a:latin typeface="맑은 고딕"/>
+                        </a:rPr>
+                        <a:t> (Factory)</a:t>
                       </a:r>
                     </a:p>
                   </a:txBody>
@@ -4475,14 +4490,65 @@
                     <a:p>
                       <a:pPr algn="l"/>
                       <a:r>
-                        <a:rPr sz="1600" b="1">
+                        <a:rPr sz="1600" b="1" dirty="0" err="1">
+                          <a:solidFill>
+                            <a:srgbClr val="FF0000"/>
+                          </a:solidFill>
+                          <a:latin typeface="맑은 고딕"/>
+                        </a:rPr>
+                        <a:t>전략</a:t>
+                      </a:r>
+                      <a:r>
+                        <a:rPr sz="1600" b="1" dirty="0">
                           <a:solidFill>
                             <a:srgbClr val="FFFFFF"/>
                           </a:solidFill>
                           <a:latin typeface="맑은 고딕"/>
                         </a:rPr>
-                        <a:t>전략 (Strategy)</a:t>
+                        <a:t> (Strategy)</a:t>
                       </a:r>
+                      <a:r>
+                        <a:rPr lang="en-US" sz="1600" b="1" dirty="0">
+                          <a:solidFill>
+                            <a:srgbClr val="FFFFFF"/>
+                          </a:solidFill>
+                          <a:latin typeface="맑은 고딕"/>
+                        </a:rPr>
+                        <a:t> DI + </a:t>
+                      </a:r>
+                      <a:r>
+                        <a:rPr lang="ko-KR" altLang="en-US" sz="1600" b="1" dirty="0">
+                          <a:solidFill>
+                            <a:srgbClr val="FFFFFF"/>
+                          </a:solidFill>
+                          <a:latin typeface="맑은 고딕"/>
+                        </a:rPr>
+                        <a:t>인터페이스 </a:t>
+                      </a:r>
+                      <a:r>
+                        <a:rPr lang="en-US" altLang="ko-KR" sz="1600" b="1" dirty="0">
+                          <a:solidFill>
+                            <a:srgbClr val="FFFFFF"/>
+                          </a:solidFill>
+                          <a:latin typeface="맑은 고딕"/>
+                        </a:rPr>
+                        <a:t>+ </a:t>
+                      </a:r>
+                      <a:r>
+                        <a:rPr lang="ko-KR" altLang="en-US" sz="1600" b="1" dirty="0">
+                          <a:solidFill>
+                            <a:srgbClr val="FFFFFF"/>
+                          </a:solidFill>
+                          <a:latin typeface="맑은 고딕"/>
+                        </a:rPr>
+                        <a:t>알고리즘</a:t>
+                      </a:r>
+                      <a:endParaRPr sz="1600" b="1" dirty="0">
+                        <a:solidFill>
+                          <a:srgbClr val="FFFFFF"/>
+                        </a:solidFill>
+                        <a:latin typeface="맑은 고딕"/>
+                      </a:endParaRPr>
                     </a:p>
                   </a:txBody>
                   <a:tcPr marL="109728" marR="109728" marT="36576" marB="36576" anchor="ctr">
@@ -4551,14 +4617,56 @@
                     <a:p>
                       <a:pPr algn="l"/>
                       <a:r>
-                        <a:rPr sz="1600" b="0">
+                        <a:rPr sz="1600" b="0" dirty="0" err="1">
                           <a:solidFill>
                             <a:srgbClr val="222933"/>
                           </a:solidFill>
                           <a:latin typeface="맑은 고딕"/>
                         </a:rPr>
-                        <a:t>동작(알고리즘)을 갈아끼운다</a:t>
+                        <a:t>동작</a:t>
                       </a:r>
+                      <a:r>
+                        <a:rPr sz="1600" b="0" dirty="0">
+                          <a:solidFill>
+                            <a:srgbClr val="222933"/>
+                          </a:solidFill>
+                          <a:latin typeface="맑은 고딕"/>
+                        </a:rPr>
+                        <a:t>(</a:t>
+                      </a:r>
+                      <a:r>
+                        <a:rPr sz="1600" b="0" dirty="0" err="1">
+                          <a:solidFill>
+                            <a:srgbClr val="222933"/>
+                          </a:solidFill>
+                          <a:latin typeface="맑은 고딕"/>
+                        </a:rPr>
+                        <a:t>알고리즘</a:t>
+                      </a:r>
+                      <a:r>
+                        <a:rPr sz="1600" b="0" dirty="0">
+                          <a:solidFill>
+                            <a:srgbClr val="222933"/>
+                          </a:solidFill>
+                          <a:latin typeface="맑은 고딕"/>
+                        </a:rPr>
+                        <a:t>)을 </a:t>
+                      </a:r>
+                      <a:r>
+                        <a:rPr sz="1600" b="0" dirty="0" err="1">
+                          <a:solidFill>
+                            <a:srgbClr val="222933"/>
+                          </a:solidFill>
+                          <a:latin typeface="맑은 고딕"/>
+                        </a:rPr>
+                        <a:t>갈아끼운다</a:t>
+                      </a:r>
+                      <a:endParaRPr sz="1600" b="0" dirty="0">
+                        <a:solidFill>
+                          <a:srgbClr val="222933"/>
+                        </a:solidFill>
+                        <a:latin typeface="맑은 고딕"/>
+                      </a:endParaRPr>
                     </a:p>
                   </a:txBody>
                   <a:tcPr marL="109728" marR="109728" marT="36576" marB="36576" anchor="ctr">
@@ -4604,13 +4712,40 @@
                     <a:p>
                       <a:pPr algn="l"/>
                       <a:r>
-                        <a:rPr sz="1600" b="0">
+                        <a:rPr sz="1600" b="0" dirty="0" err="1">
                           <a:solidFill>
                             <a:srgbClr val="222933"/>
                           </a:solidFill>
                           <a:latin typeface="맑은 고딕"/>
                         </a:rPr>
-                        <a:t>무엇을 만들까?</a:t>
+                        <a:t>무엇을</a:t>
+                      </a:r>
+                      <a:r>
+                        <a:rPr sz="1600" b="0" dirty="0">
+                          <a:solidFill>
+                            <a:srgbClr val="222933"/>
+                          </a:solidFill>
+                          <a:latin typeface="맑은 고딕"/>
+                        </a:rPr>
+                        <a:t> </a:t>
+                      </a:r>
+                      <a:r>
+                        <a:rPr sz="1600" b="0" dirty="0" err="1">
+                          <a:solidFill>
+                            <a:srgbClr val="222933"/>
+                          </a:solidFill>
+                          <a:latin typeface="맑은 고딕"/>
+                        </a:rPr>
+                        <a:t>만들까</a:t>
+                      </a:r>
+                      <a:r>
+                        <a:rPr sz="1600" b="0" dirty="0">
+                          <a:solidFill>
+                            <a:srgbClr val="222933"/>
+                          </a:solidFill>
+                          <a:latin typeface="맑은 고딕"/>
+                        </a:rPr>
+                        <a:t>?</a:t>
                       </a:r>
                     </a:p>
                   </a:txBody>
@@ -4627,13 +4762,40 @@
                     <a:p>
                       <a:pPr algn="l"/>
                       <a:r>
-                        <a:rPr sz="1600" b="0">
+                        <a:rPr sz="1600" b="0" dirty="0" err="1">
                           <a:solidFill>
                             <a:srgbClr val="222933"/>
                           </a:solidFill>
                           <a:latin typeface="맑은 고딕"/>
                         </a:rPr>
-                        <a:t>어떻게 처리할까?</a:t>
+                        <a:t>어떻게</a:t>
+                      </a:r>
+                      <a:r>
+                        <a:rPr sz="1600" b="0" dirty="0">
+                          <a:solidFill>
+                            <a:srgbClr val="222933"/>
+                          </a:solidFill>
+                          <a:latin typeface="맑은 고딕"/>
+                        </a:rPr>
+                        <a:t> </a:t>
+                      </a:r>
+                      <a:r>
+                        <a:rPr sz="1600" b="0" dirty="0" err="1">
+                          <a:solidFill>
+                            <a:srgbClr val="222933"/>
+                          </a:solidFill>
+                          <a:latin typeface="맑은 고딕"/>
+                        </a:rPr>
+                        <a:t>처리할까</a:t>
+                      </a:r>
+                      <a:r>
+                        <a:rPr sz="1600" b="0" dirty="0">
+                          <a:solidFill>
+                            <a:srgbClr val="222933"/>
+                          </a:solidFill>
+                          <a:latin typeface="맑은 고딕"/>
+                        </a:rPr>
+                        <a:t>?</a:t>
                       </a:r>
                     </a:p>
                   </a:txBody>
@@ -4680,14 +4842,38 @@
                     <a:p>
                       <a:pPr algn="l"/>
                       <a:r>
-                        <a:rPr sz="1600" b="0">
+                        <a:rPr sz="1600" b="0" dirty="0" err="1">
                           <a:solidFill>
                             <a:srgbClr val="222933"/>
                           </a:solidFill>
                           <a:latin typeface="맑은 고딕"/>
                         </a:rPr>
-                        <a:t>from_wire, make_message</a:t>
+                        <a:t>from_wire</a:t>
                       </a:r>
+                      <a:r>
+                        <a:rPr sz="1600" b="0" dirty="0">
+                          <a:solidFill>
+                            <a:srgbClr val="222933"/>
+                          </a:solidFill>
+                          <a:latin typeface="맑은 고딕"/>
+                        </a:rPr>
+                        <a:t>, </a:t>
+                      </a:r>
+                      <a:r>
+                        <a:rPr sz="1600" b="0" dirty="0" err="1">
+                          <a:solidFill>
+                            <a:srgbClr val="222933"/>
+                          </a:solidFill>
+                          <a:latin typeface="맑은 고딕"/>
+                        </a:rPr>
+                        <a:t>make_message</a:t>
+                      </a:r>
+                      <a:endParaRPr sz="1600" b="0" dirty="0">
+                        <a:solidFill>
+                          <a:srgbClr val="222933"/>
+                        </a:solidFill>
+                        <a:latin typeface="맑은 고딕"/>
+                      </a:endParaRPr>
                     </a:p>
                   </a:txBody>
                   <a:tcPr marL="109728" marR="109728" marT="36576" marB="36576" anchor="ctr">
@@ -4703,14 +4889,29 @@
                     <a:p>
                       <a:pPr algn="l"/>
                       <a:r>
-                        <a:rPr sz="1600" b="0">
+                        <a:rPr sz="1600" b="0" dirty="0">
                           <a:solidFill>
                             <a:srgbClr val="222933"/>
                           </a:solidFill>
                           <a:latin typeface="맑은 고딕"/>
                         </a:rPr>
-                        <a:t>Codec, RoomRepository</a:t>
+                        <a:t>Codec, </a:t>
                       </a:r>
+                      <a:r>
+                        <a:rPr sz="1600" b="0" dirty="0" err="1">
+                          <a:solidFill>
+                            <a:srgbClr val="222933"/>
+                          </a:solidFill>
+                          <a:latin typeface="맑은 고딕"/>
+                        </a:rPr>
+                        <a:t>RoomRepository</a:t>
+                      </a:r>
+                      <a:endParaRPr sz="1600" b="0" dirty="0">
+                        <a:solidFill>
+                          <a:srgbClr val="222933"/>
+                        </a:solidFill>
+                        <a:latin typeface="맑은 고딕"/>
+                      </a:endParaRPr>
                     </a:p>
                   </a:txBody>
                   <a:tcPr marL="109728" marR="109728" marT="36576" marB="36576" anchor="ctr">
@@ -4779,14 +4980,56 @@
                     <a:p>
                       <a:pPr algn="l"/>
                       <a:r>
-                        <a:rPr sz="1600" b="0">
+                        <a:rPr sz="1600" b="0" dirty="0" err="1">
                           <a:solidFill>
                             <a:srgbClr val="222933"/>
                           </a:solidFill>
                           <a:latin typeface="맑은 고딕"/>
                         </a:rPr>
-                        <a:t>평문 ↔ AES,  메모리 ↔ 파일</a:t>
+                        <a:t>평문</a:t>
                       </a:r>
+                      <a:r>
+                        <a:rPr sz="1600" b="0" dirty="0">
+                          <a:solidFill>
+                            <a:srgbClr val="222933"/>
+                          </a:solidFill>
+                          <a:latin typeface="맑은 고딕"/>
+                        </a:rPr>
+                        <a:t> ↔ AES,  </a:t>
+                      </a:r>
+                      <a:r>
+                        <a:rPr sz="1600" b="0" dirty="0" err="1">
+                          <a:solidFill>
+                            <a:srgbClr val="222933"/>
+                          </a:solidFill>
+                          <a:latin typeface="맑은 고딕"/>
+                        </a:rPr>
+                        <a:t>메모리</a:t>
+                      </a:r>
+                      <a:r>
+                        <a:rPr sz="1600" b="0" dirty="0">
+                          <a:solidFill>
+                            <a:srgbClr val="222933"/>
+                          </a:solidFill>
+                          <a:latin typeface="맑은 고딕"/>
+                        </a:rPr>
+                        <a:t> ↔ </a:t>
+                      </a:r>
+                      <a:r>
+                        <a:rPr sz="1600" b="0" dirty="0" err="1">
+                          <a:solidFill>
+                            <a:srgbClr val="222933"/>
+                          </a:solidFill>
+                          <a:latin typeface="맑은 고딕"/>
+                        </a:rPr>
+                        <a:t>파일</a:t>
+                      </a:r>
+                      <a:endParaRPr sz="1600" b="0" dirty="0">
+                        <a:solidFill>
+                          <a:srgbClr val="222933"/>
+                        </a:solidFill>
+                        <a:latin typeface="맑은 고딕"/>
+                      </a:endParaRPr>
                     </a:p>
                   </a:txBody>
                   <a:tcPr marL="109728" marR="109728" marT="36576" marB="36576" anchor="ctr">
@@ -5456,13 +5699,121 @@
               </a:spcAft>
             </a:pPr>
             <a:r>
-              <a:rPr sz="2200" b="1">
+              <a:rPr sz="2200" b="1" dirty="0">
                 <a:solidFill>
                   <a:srgbClr val="222933"/>
                 </a:solidFill>
                 <a:latin typeface="맑은 고딕"/>
               </a:rPr>
-              <a:t>•  연결 관리 — 누가 접속해 있나 (Session / ConnectionManager)</a:t>
+              <a:t>•  </a:t>
+            </a:r>
+            <a:r>
+              <a:rPr sz="2200" b="1" dirty="0" err="1">
+                <a:solidFill>
+                  <a:srgbClr val="222933"/>
+                </a:solidFill>
+                <a:latin typeface="맑은 고딕"/>
+              </a:rPr>
+              <a:t>연결</a:t>
+            </a:r>
+            <a:r>
+              <a:rPr sz="2200" b="1" dirty="0">
+                <a:solidFill>
+                  <a:srgbClr val="222933"/>
+                </a:solidFill>
+                <a:latin typeface="맑은 고딕"/>
+              </a:rPr>
+              <a:t> </a:t>
+            </a:r>
+            <a:r>
+              <a:rPr sz="2200" b="1" dirty="0" err="1">
+                <a:solidFill>
+                  <a:srgbClr val="222933"/>
+                </a:solidFill>
+                <a:latin typeface="맑은 고딕"/>
+              </a:rPr>
+              <a:t>관리</a:t>
+            </a:r>
+            <a:r>
+              <a:rPr sz="2200" b="1" dirty="0">
+                <a:solidFill>
+                  <a:srgbClr val="222933"/>
+                </a:solidFill>
+                <a:latin typeface="맑은 고딕"/>
+              </a:rPr>
+              <a:t> — </a:t>
+            </a:r>
+            <a:r>
+              <a:rPr sz="2200" b="1" dirty="0" err="1">
+                <a:solidFill>
+                  <a:srgbClr val="222933"/>
+                </a:solidFill>
+                <a:latin typeface="맑은 고딕"/>
+              </a:rPr>
+              <a:t>누가</a:t>
+            </a:r>
+            <a:r>
+              <a:rPr sz="2200" b="1" dirty="0">
+                <a:solidFill>
+                  <a:srgbClr val="222933"/>
+                </a:solidFill>
+                <a:latin typeface="맑은 고딕"/>
+              </a:rPr>
+              <a:t> </a:t>
+            </a:r>
+            <a:r>
+              <a:rPr sz="2200" b="1" dirty="0" err="1">
+                <a:solidFill>
+                  <a:srgbClr val="222933"/>
+                </a:solidFill>
+                <a:latin typeface="맑은 고딕"/>
+              </a:rPr>
+              <a:t>접속해</a:t>
+            </a:r>
+            <a:r>
+              <a:rPr sz="2200" b="1" dirty="0">
+                <a:solidFill>
+                  <a:srgbClr val="222933"/>
+                </a:solidFill>
+                <a:latin typeface="맑은 고딕"/>
+              </a:rPr>
+              <a:t> </a:t>
+            </a:r>
+            <a:r>
+              <a:rPr sz="2200" b="1" dirty="0" err="1">
+                <a:solidFill>
+                  <a:srgbClr val="222933"/>
+                </a:solidFill>
+                <a:latin typeface="맑은 고딕"/>
+              </a:rPr>
+              <a:t>있나</a:t>
+            </a:r>
+            <a:r>
+              <a:rPr sz="2200" b="1" dirty="0">
+                <a:solidFill>
+                  <a:srgbClr val="222933"/>
+                </a:solidFill>
+                <a:latin typeface="맑은 고딕"/>
+              </a:rPr>
+              <a:t> (Session / </a:t>
+            </a:r>
+            <a:r>
+              <a:rPr sz="2200" b="1" dirty="0" err="1">
+                <a:solidFill>
+                  <a:srgbClr val="222933"/>
+                </a:solidFill>
+                <a:latin typeface="맑은 고딕"/>
+              </a:rPr>
+              <a:t>ConnectionManager</a:t>
+            </a:r>
+            <a:r>
+              <a:rPr sz="2200" b="1" dirty="0">
+                <a:solidFill>
+                  <a:srgbClr val="222933"/>
+                </a:solidFill>
+                <a:latin typeface="맑은 고딕"/>
+              </a:rPr>
+              <a:t>)</a:t>
             </a:r>
           </a:p>
           <a:p>
@@ -5475,13 +5826,67 @@
               </a:spcAft>
             </a:pPr>
             <a:r>
-              <a:rPr sz="2200" b="1">
+              <a:rPr sz="2200" b="1" dirty="0">
                 <a:solidFill>
                   <a:srgbClr val="222933"/>
                 </a:solidFill>
                 <a:latin typeface="맑은 고딕"/>
               </a:rPr>
-              <a:t>•  명령 해석 — /create, /join, /w … (CommandHandler)</a:t>
+              <a:t>•  </a:t>
+            </a:r>
+            <a:r>
+              <a:rPr sz="2200" b="1" dirty="0" err="1">
+                <a:solidFill>
+                  <a:srgbClr val="222933"/>
+                </a:solidFill>
+                <a:latin typeface="맑은 고딕"/>
+              </a:rPr>
+              <a:t>명령</a:t>
+            </a:r>
+            <a:r>
+              <a:rPr sz="2200" b="1" dirty="0">
+                <a:solidFill>
+                  <a:srgbClr val="222933"/>
+                </a:solidFill>
+                <a:latin typeface="맑은 고딕"/>
+              </a:rPr>
+              <a:t> </a:t>
+            </a:r>
+            <a:r>
+              <a:rPr sz="2200" b="1" dirty="0" err="1">
+                <a:solidFill>
+                  <a:srgbClr val="222933"/>
+                </a:solidFill>
+                <a:latin typeface="맑은 고딕"/>
+              </a:rPr>
+              <a:t>해석</a:t>
+            </a:r>
+            <a:r>
+              <a:rPr sz="2200" b="1" dirty="0">
+                <a:solidFill>
+                  <a:srgbClr val="222933"/>
+                </a:solidFill>
+                <a:latin typeface="맑은 고딕"/>
+              </a:rPr>
+              <a:t> — /create, /join, /w … (</a:t>
+            </a:r>
+            <a:r>
+              <a:rPr sz="2200" b="1" dirty="0" err="1">
+                <a:solidFill>
+                  <a:srgbClr val="222933"/>
+                </a:solidFill>
+                <a:latin typeface="맑은 고딕"/>
+              </a:rPr>
+              <a:t>CommandHandler</a:t>
+            </a:r>
+            <a:r>
+              <a:rPr sz="2200" b="1" dirty="0">
+                <a:solidFill>
+                  <a:srgbClr val="222933"/>
+                </a:solidFill>
+                <a:latin typeface="맑은 고딕"/>
+              </a:rPr>
+              <a:t>)</a:t>
             </a:r>
           </a:p>
           <a:p>
@@ -5494,13 +5899,67 @@
               </a:spcAft>
             </a:pPr>
             <a:r>
-              <a:rPr sz="2200" b="1">
+              <a:rPr sz="2200" b="1" dirty="0">
                 <a:solidFill>
                   <a:srgbClr val="222933"/>
                 </a:solidFill>
                 <a:latin typeface="맑은 고딕"/>
               </a:rPr>
-              <a:t>•  방 라우팅 — 누구에게 보낼까 (Room)</a:t>
+              <a:t>•  방 </a:t>
+            </a:r>
+            <a:r>
+              <a:rPr sz="2200" b="1" dirty="0" err="1">
+                <a:solidFill>
+                  <a:srgbClr val="222933"/>
+                </a:solidFill>
+                <a:latin typeface="맑은 고딕"/>
+              </a:rPr>
+              <a:t>라우팅</a:t>
+            </a:r>
+            <a:r>
+              <a:rPr sz="2200" b="1" dirty="0">
+                <a:solidFill>
+                  <a:srgbClr val="222933"/>
+                </a:solidFill>
+                <a:latin typeface="맑은 고딕"/>
+              </a:rPr>
+              <a:t> — </a:t>
+            </a:r>
+            <a:r>
+              <a:rPr sz="2200" b="1" dirty="0" err="1">
+                <a:solidFill>
+                  <a:srgbClr val="222933"/>
+                </a:solidFill>
+                <a:latin typeface="맑은 고딕"/>
+              </a:rPr>
+              <a:t>누구에게</a:t>
+            </a:r>
+            <a:r>
+              <a:rPr sz="2200" b="1" dirty="0">
+                <a:solidFill>
+                  <a:srgbClr val="222933"/>
+                </a:solidFill>
+                <a:latin typeface="맑은 고딕"/>
+              </a:rPr>
+              <a:t> </a:t>
+            </a:r>
+            <a:r>
+              <a:rPr sz="2200" b="1" dirty="0" err="1">
+                <a:solidFill>
+                  <a:srgbClr val="222933"/>
+                </a:solidFill>
+                <a:latin typeface="맑은 고딕"/>
+              </a:rPr>
+              <a:t>보낼까</a:t>
+            </a:r>
+            <a:r>
+              <a:rPr sz="2200" b="1" dirty="0">
+                <a:solidFill>
+                  <a:srgbClr val="222933"/>
+                </a:solidFill>
+                <a:latin typeface="맑은 고딕"/>
+              </a:rPr>
+              <a:t> (Room)</a:t>
             </a:r>
           </a:p>
           <a:p>
@@ -5513,13 +5972,103 @@
               </a:spcAft>
             </a:pPr>
             <a:r>
-              <a:rPr sz="2200" b="1">
+              <a:rPr sz="2200" b="1" dirty="0">
                 <a:solidFill>
                   <a:srgbClr val="222933"/>
                 </a:solidFill>
                 <a:latin typeface="맑은 고딕"/>
               </a:rPr>
-              <a:t>•  저장 — 방을 어디에 둘까 (RoomRepository)</a:t>
+              <a:t>•  </a:t>
+            </a:r>
+            <a:r>
+              <a:rPr sz="2200" b="1" dirty="0" err="1">
+                <a:solidFill>
+                  <a:srgbClr val="222933"/>
+                </a:solidFill>
+                <a:latin typeface="맑은 고딕"/>
+              </a:rPr>
+              <a:t>저장</a:t>
+            </a:r>
+            <a:r>
+              <a:rPr sz="2200" b="1" dirty="0">
+                <a:solidFill>
+                  <a:srgbClr val="222933"/>
+                </a:solidFill>
+                <a:latin typeface="맑은 고딕"/>
+              </a:rPr>
+              <a:t> — </a:t>
+            </a:r>
+            <a:r>
+              <a:rPr sz="2200" b="1" dirty="0" err="1">
+                <a:solidFill>
+                  <a:srgbClr val="222933"/>
+                </a:solidFill>
+                <a:latin typeface="맑은 고딕"/>
+              </a:rPr>
+              <a:t>방을</a:t>
+            </a:r>
+            <a:r>
+              <a:rPr sz="2200" b="1" dirty="0">
+                <a:solidFill>
+                  <a:srgbClr val="222933"/>
+                </a:solidFill>
+                <a:latin typeface="맑은 고딕"/>
+              </a:rPr>
+              <a:t> </a:t>
+            </a:r>
+            <a:r>
+              <a:rPr sz="2200" b="1" dirty="0" err="1">
+                <a:solidFill>
+                  <a:srgbClr val="222933"/>
+                </a:solidFill>
+                <a:latin typeface="맑은 고딕"/>
+              </a:rPr>
+              <a:t>어디에</a:t>
+            </a:r>
+            <a:r>
+              <a:rPr sz="2200" b="1" dirty="0">
+                <a:solidFill>
+                  <a:srgbClr val="222933"/>
+                </a:solidFill>
+                <a:latin typeface="맑은 고딕"/>
+              </a:rPr>
+              <a:t> </a:t>
+            </a:r>
+            <a:r>
+              <a:rPr sz="2200" b="1" dirty="0" err="1">
+                <a:solidFill>
+                  <a:srgbClr val="222933"/>
+                </a:solidFill>
+                <a:latin typeface="맑은 고딕"/>
+              </a:rPr>
+              <a:t>둘까</a:t>
+            </a:r>
+            <a:r>
+              <a:rPr sz="2200" b="1" dirty="0">
+                <a:solidFill>
+                  <a:srgbClr val="222933"/>
+                </a:solidFill>
+                <a:latin typeface="맑은 고딕"/>
+              </a:rPr>
+              <a:t> (</a:t>
+            </a:r>
+            <a:r>
+              <a:rPr sz="2200" b="1" dirty="0" err="1">
+                <a:solidFill>
+                  <a:srgbClr val="222933"/>
+                </a:solidFill>
+                <a:latin typeface="맑은 고딕"/>
+              </a:rPr>
+              <a:t>RoomRepository</a:t>
+            </a:r>
+            <a:r>
+              <a:rPr sz="2200" b="1" dirty="0">
+                <a:solidFill>
+                  <a:srgbClr val="222933"/>
+                </a:solidFill>
+                <a:latin typeface="맑은 고딕"/>
+              </a:rPr>
+              <a:t>)</a:t>
             </a:r>
           </a:p>
           <a:p>
@@ -5532,14 +6081,155 @@
               </a:spcAft>
             </a:pPr>
             <a:r>
-              <a:rPr sz="2200" b="1">
+              <a:rPr sz="2200" b="1" dirty="0">
                 <a:solidFill>
                   <a:srgbClr val="222933"/>
                 </a:solidFill>
                 <a:latin typeface="맑은 고딕"/>
               </a:rPr>
-              <a:t>•  각자 자기 일만 하면, 고칠 때 '어디를 볼지'가 분명해진다</a:t>
-            </a:r>
+              <a:t>•  </a:t>
+            </a:r>
+            <a:r>
+              <a:rPr sz="2200" b="1" dirty="0" err="1">
+                <a:solidFill>
+                  <a:srgbClr val="222933"/>
+                </a:solidFill>
+                <a:latin typeface="맑은 고딕"/>
+              </a:rPr>
+              <a:t>각자</a:t>
+            </a:r>
+            <a:r>
+              <a:rPr sz="2200" b="1" dirty="0">
+                <a:solidFill>
+                  <a:srgbClr val="222933"/>
+                </a:solidFill>
+                <a:latin typeface="맑은 고딕"/>
+              </a:rPr>
+              <a:t> </a:t>
+            </a:r>
+            <a:r>
+              <a:rPr sz="2200" b="1" dirty="0" err="1">
+                <a:solidFill>
+                  <a:srgbClr val="222933"/>
+                </a:solidFill>
+                <a:latin typeface="맑은 고딕"/>
+              </a:rPr>
+              <a:t>자기</a:t>
+            </a:r>
+            <a:r>
+              <a:rPr sz="2200" b="1" dirty="0">
+                <a:solidFill>
+                  <a:srgbClr val="222933"/>
+                </a:solidFill>
+                <a:latin typeface="맑은 고딕"/>
+              </a:rPr>
+              <a:t> </a:t>
+            </a:r>
+            <a:r>
+              <a:rPr sz="2200" b="1" dirty="0" err="1">
+                <a:solidFill>
+                  <a:srgbClr val="222933"/>
+                </a:solidFill>
+                <a:latin typeface="맑은 고딕"/>
+              </a:rPr>
+              <a:t>일만</a:t>
+            </a:r>
+            <a:r>
+              <a:rPr sz="2200" b="1" dirty="0">
+                <a:solidFill>
+                  <a:srgbClr val="222933"/>
+                </a:solidFill>
+                <a:latin typeface="맑은 고딕"/>
+              </a:rPr>
+              <a:t> </a:t>
+            </a:r>
+            <a:r>
+              <a:rPr sz="2200" b="1" dirty="0" err="1">
+                <a:solidFill>
+                  <a:srgbClr val="222933"/>
+                </a:solidFill>
+                <a:latin typeface="맑은 고딕"/>
+              </a:rPr>
+              <a:t>하면</a:t>
+            </a:r>
+            <a:r>
+              <a:rPr sz="2200" b="1" dirty="0">
+                <a:solidFill>
+                  <a:srgbClr val="222933"/>
+                </a:solidFill>
+                <a:latin typeface="맑은 고딕"/>
+              </a:rPr>
+              <a:t>, </a:t>
+            </a:r>
+            <a:r>
+              <a:rPr sz="2200" b="1" dirty="0" err="1">
+                <a:solidFill>
+                  <a:srgbClr val="222933"/>
+                </a:solidFill>
+                <a:latin typeface="맑은 고딕"/>
+              </a:rPr>
+              <a:t>고칠</a:t>
+            </a:r>
+            <a:r>
+              <a:rPr sz="2200" b="1" dirty="0">
+                <a:solidFill>
+                  <a:srgbClr val="222933"/>
+                </a:solidFill>
+                <a:latin typeface="맑은 고딕"/>
+              </a:rPr>
+              <a:t> 때 '</a:t>
+            </a:r>
+            <a:r>
+              <a:rPr sz="2200" b="1" dirty="0" err="1">
+                <a:solidFill>
+                  <a:srgbClr val="222933"/>
+                </a:solidFill>
+                <a:latin typeface="맑은 고딕"/>
+              </a:rPr>
+              <a:t>어디를</a:t>
+            </a:r>
+            <a:r>
+              <a:rPr sz="2200" b="1" dirty="0">
+                <a:solidFill>
+                  <a:srgbClr val="222933"/>
+                </a:solidFill>
+                <a:latin typeface="맑은 고딕"/>
+              </a:rPr>
+              <a:t> </a:t>
+            </a:r>
+            <a:r>
+              <a:rPr sz="2200" b="1" dirty="0" err="1">
+                <a:solidFill>
+                  <a:srgbClr val="222933"/>
+                </a:solidFill>
+                <a:latin typeface="맑은 고딕"/>
+              </a:rPr>
+              <a:t>볼지'가</a:t>
+            </a:r>
+            <a:r>
+              <a:rPr sz="2200" b="1" dirty="0">
+                <a:solidFill>
+                  <a:srgbClr val="222933"/>
+                </a:solidFill>
+                <a:latin typeface="맑은 고딕"/>
+              </a:rPr>
+              <a:t> </a:t>
+            </a:r>
+            <a:r>
+              <a:rPr sz="2200" b="1" dirty="0" err="1">
+                <a:solidFill>
+                  <a:srgbClr val="222933"/>
+                </a:solidFill>
+                <a:latin typeface="맑은 고딕"/>
+              </a:rPr>
+              <a:t>분명해진다</a:t>
+            </a:r>
+            <a:endParaRPr sz="2200" b="1" dirty="0">
+              <a:solidFill>
+                <a:srgbClr val="222933"/>
+              </a:solidFill>
+              <a:latin typeface="맑은 고딕"/>
+            </a:endParaRPr>
           </a:p>
         </p:txBody>
       </p:sp>
@@ -5693,14 +6383,155 @@
               </a:spcAft>
             </a:pPr>
             <a:r>
-              <a:rPr sz="2200" b="1">
+              <a:rPr sz="2200" b="1" dirty="0">
                 <a:solidFill>
                   <a:srgbClr val="222933"/>
                 </a:solidFill>
                 <a:latin typeface="맑은 고딕"/>
               </a:rPr>
-              <a:t>•  ChatServer 는 직접 일하지 않는다. 부품들에게 시키고 흐름만 잇는다</a:t>
-            </a:r>
+              <a:t>•  </a:t>
+            </a:r>
+            <a:r>
+              <a:rPr sz="2200" b="1" dirty="0" err="1">
+                <a:solidFill>
+                  <a:srgbClr val="222933"/>
+                </a:solidFill>
+                <a:latin typeface="맑은 고딕"/>
+              </a:rPr>
+              <a:t>ChatServer</a:t>
+            </a:r>
+            <a:r>
+              <a:rPr sz="2200" b="1" dirty="0">
+                <a:solidFill>
+                  <a:srgbClr val="222933"/>
+                </a:solidFill>
+                <a:latin typeface="맑은 고딕"/>
+              </a:rPr>
+              <a:t> 는 </a:t>
+            </a:r>
+            <a:r>
+              <a:rPr sz="2200" b="1" dirty="0" err="1">
+                <a:solidFill>
+                  <a:srgbClr val="222933"/>
+                </a:solidFill>
+                <a:latin typeface="맑은 고딕"/>
+              </a:rPr>
+              <a:t>직접</a:t>
+            </a:r>
+            <a:r>
+              <a:rPr sz="2200" b="1" dirty="0">
+                <a:solidFill>
+                  <a:srgbClr val="222933"/>
+                </a:solidFill>
+                <a:latin typeface="맑은 고딕"/>
+              </a:rPr>
+              <a:t> </a:t>
+            </a:r>
+            <a:r>
+              <a:rPr sz="2200" b="1" dirty="0" err="1">
+                <a:solidFill>
+                  <a:srgbClr val="222933"/>
+                </a:solidFill>
+                <a:latin typeface="맑은 고딕"/>
+              </a:rPr>
+              <a:t>일하지</a:t>
+            </a:r>
+            <a:r>
+              <a:rPr sz="2200" b="1" dirty="0">
+                <a:solidFill>
+                  <a:srgbClr val="222933"/>
+                </a:solidFill>
+                <a:latin typeface="맑은 고딕"/>
+              </a:rPr>
+              <a:t> </a:t>
+            </a:r>
+            <a:r>
+              <a:rPr sz="2200" b="1" dirty="0" err="1">
+                <a:solidFill>
+                  <a:srgbClr val="222933"/>
+                </a:solidFill>
+                <a:latin typeface="맑은 고딕"/>
+              </a:rPr>
+              <a:t>않는다</a:t>
+            </a:r>
+            <a:r>
+              <a:rPr sz="2200" b="1" dirty="0">
+                <a:solidFill>
+                  <a:srgbClr val="222933"/>
+                </a:solidFill>
+                <a:latin typeface="맑은 고딕"/>
+              </a:rPr>
+              <a:t>. </a:t>
+            </a:r>
+            <a:r>
+              <a:rPr sz="2200" b="1" dirty="0" err="1">
+                <a:solidFill>
+                  <a:srgbClr val="222933"/>
+                </a:solidFill>
+                <a:latin typeface="맑은 고딕"/>
+              </a:rPr>
+              <a:t>부품들에게</a:t>
+            </a:r>
+            <a:r>
+              <a:rPr sz="2200" b="1" dirty="0">
+                <a:solidFill>
+                  <a:srgbClr val="222933"/>
+                </a:solidFill>
+                <a:latin typeface="맑은 고딕"/>
+              </a:rPr>
+              <a:t> </a:t>
+            </a:r>
+            <a:r>
+              <a:rPr sz="2200" b="1" dirty="0" err="1">
+                <a:solidFill>
+                  <a:srgbClr val="222933"/>
+                </a:solidFill>
+                <a:latin typeface="맑은 고딕"/>
+              </a:rPr>
+              <a:t>시키고</a:t>
+            </a:r>
+            <a:r>
+              <a:rPr sz="2200" b="1" dirty="0">
+                <a:solidFill>
+                  <a:srgbClr val="222933"/>
+                </a:solidFill>
+                <a:latin typeface="맑은 고딕"/>
+              </a:rPr>
+              <a:t> </a:t>
+            </a:r>
+            <a:r>
+              <a:rPr sz="2200" b="1" dirty="0" err="1">
+                <a:solidFill>
+                  <a:srgbClr val="222933"/>
+                </a:solidFill>
+                <a:latin typeface="맑은 고딕"/>
+              </a:rPr>
+              <a:t>흐름만</a:t>
+            </a:r>
+            <a:r>
+              <a:rPr sz="2200" b="1" dirty="0">
+                <a:solidFill>
+                  <a:srgbClr val="222933"/>
+                </a:solidFill>
+                <a:latin typeface="맑은 고딕"/>
+              </a:rPr>
+              <a:t> </a:t>
+            </a:r>
+            <a:r>
+              <a:rPr sz="2200" b="1" dirty="0" err="1">
+                <a:solidFill>
+                  <a:srgbClr val="222933"/>
+                </a:solidFill>
+                <a:latin typeface="맑은 고딕"/>
+              </a:rPr>
+              <a:t>잇는다</a:t>
+            </a:r>
+            <a:endParaRPr sz="2200" b="1" dirty="0">
+              <a:solidFill>
+                <a:srgbClr val="222933"/>
+              </a:solidFill>
+              <a:latin typeface="맑은 고딕"/>
+            </a:endParaRPr>
           </a:p>
           <a:p>
             <a:pPr>
@@ -5712,14 +6543,101 @@
               </a:spcAft>
             </a:pPr>
             <a:r>
-              <a:rPr sz="1900" b="0">
+              <a:rPr sz="1900" b="0" dirty="0">
                 <a:solidFill>
                   <a:srgbClr val="6B7A8C"/>
                 </a:solidFill>
                 <a:latin typeface="맑은 고딕"/>
               </a:rPr>
-              <a:t>–  on_line: 명령이면 CommandHandler 에, 아니면 Room 에 넘긴다</a:t>
-            </a:r>
+              <a:t>–  </a:t>
+            </a:r>
+            <a:r>
+              <a:rPr sz="1900" b="0" dirty="0" err="1">
+                <a:solidFill>
+                  <a:srgbClr val="6B7A8C"/>
+                </a:solidFill>
+                <a:latin typeface="맑은 고딕"/>
+              </a:rPr>
+              <a:t>on_line</a:t>
+            </a:r>
+            <a:r>
+              <a:rPr sz="1900" b="0" dirty="0">
+                <a:solidFill>
+                  <a:srgbClr val="6B7A8C"/>
+                </a:solidFill>
+                <a:latin typeface="맑은 고딕"/>
+              </a:rPr>
+              <a:t>: </a:t>
+            </a:r>
+            <a:r>
+              <a:rPr sz="1900" b="0" dirty="0" err="1">
+                <a:solidFill>
+                  <a:srgbClr val="6B7A8C"/>
+                </a:solidFill>
+                <a:latin typeface="맑은 고딕"/>
+              </a:rPr>
+              <a:t>명령이면</a:t>
+            </a:r>
+            <a:r>
+              <a:rPr sz="1900" b="0" dirty="0">
+                <a:solidFill>
+                  <a:srgbClr val="6B7A8C"/>
+                </a:solidFill>
+                <a:latin typeface="맑은 고딕"/>
+              </a:rPr>
+              <a:t> </a:t>
+            </a:r>
+            <a:r>
+              <a:rPr sz="1900" b="0" dirty="0" err="1">
+                <a:solidFill>
+                  <a:srgbClr val="6B7A8C"/>
+                </a:solidFill>
+                <a:latin typeface="맑은 고딕"/>
+              </a:rPr>
+              <a:t>CommandHandler</a:t>
+            </a:r>
+            <a:r>
+              <a:rPr sz="1900" b="0" dirty="0">
+                <a:solidFill>
+                  <a:srgbClr val="6B7A8C"/>
+                </a:solidFill>
+                <a:latin typeface="맑은 고딕"/>
+              </a:rPr>
+              <a:t> 에, </a:t>
+            </a:r>
+            <a:r>
+              <a:rPr sz="1900" b="0" dirty="0" err="1">
+                <a:solidFill>
+                  <a:srgbClr val="6B7A8C"/>
+                </a:solidFill>
+                <a:latin typeface="맑은 고딕"/>
+              </a:rPr>
+              <a:t>아니면</a:t>
+            </a:r>
+            <a:r>
+              <a:rPr sz="1900" b="0" dirty="0">
+                <a:solidFill>
+                  <a:srgbClr val="6B7A8C"/>
+                </a:solidFill>
+                <a:latin typeface="맑은 고딕"/>
+              </a:rPr>
+              <a:t> Room 에 </a:t>
+            </a:r>
+            <a:r>
+              <a:rPr sz="1900" b="0" dirty="0" err="1">
+                <a:solidFill>
+                  <a:srgbClr val="6B7A8C"/>
+                </a:solidFill>
+                <a:latin typeface="맑은 고딕"/>
+              </a:rPr>
+              <a:t>넘긴다</a:t>
+            </a:r>
+            <a:endParaRPr sz="1900" b="0" dirty="0">
+              <a:solidFill>
+                <a:srgbClr val="6B7A8C"/>
+              </a:solidFill>
+              <a:latin typeface="맑은 고딕"/>
+            </a:endParaRPr>
           </a:p>
           <a:p>
             <a:pPr>
@@ -5731,14 +6649,101 @@
               </a:spcAft>
             </a:pPr>
             <a:r>
-              <a:rPr sz="2200" b="1">
+              <a:rPr sz="2200" b="1" dirty="0">
                 <a:solidFill>
                   <a:srgbClr val="222933"/>
                 </a:solidFill>
                 <a:latin typeface="맑은 고딕"/>
               </a:rPr>
-              <a:t>•  CommandHandler 는 Room·Repository·Connections 를 불러 일을 처리</a:t>
-            </a:r>
+              <a:t>•  </a:t>
+            </a:r>
+            <a:r>
+              <a:rPr sz="2200" b="1" dirty="0" err="1">
+                <a:solidFill>
+                  <a:srgbClr val="222933"/>
+                </a:solidFill>
+                <a:latin typeface="맑은 고딕"/>
+              </a:rPr>
+              <a:t>CommandHandler</a:t>
+            </a:r>
+            <a:r>
+              <a:rPr sz="2200" b="1" dirty="0">
+                <a:solidFill>
+                  <a:srgbClr val="222933"/>
+                </a:solidFill>
+                <a:latin typeface="맑은 고딕"/>
+              </a:rPr>
+              <a:t> 는 </a:t>
+            </a:r>
+            <a:r>
+              <a:rPr sz="2200" b="1" dirty="0" err="1">
+                <a:solidFill>
+                  <a:srgbClr val="222933"/>
+                </a:solidFill>
+                <a:latin typeface="맑은 고딕"/>
+              </a:rPr>
+              <a:t>Room·Repository·Connections</a:t>
+            </a:r>
+            <a:r>
+              <a:rPr sz="2200" b="1" dirty="0">
+                <a:solidFill>
+                  <a:srgbClr val="222933"/>
+                </a:solidFill>
+                <a:latin typeface="맑은 고딕"/>
+              </a:rPr>
+              <a:t> 를 </a:t>
+            </a:r>
+            <a:r>
+              <a:rPr sz="2200" b="1" dirty="0" err="1">
+                <a:solidFill>
+                  <a:srgbClr val="222933"/>
+                </a:solidFill>
+                <a:latin typeface="맑은 고딕"/>
+              </a:rPr>
+              <a:t>불러</a:t>
+            </a:r>
+            <a:r>
+              <a:rPr sz="2200" b="1" dirty="0">
+                <a:solidFill>
+                  <a:srgbClr val="222933"/>
+                </a:solidFill>
+                <a:latin typeface="맑은 고딕"/>
+              </a:rPr>
+              <a:t> </a:t>
+            </a:r>
+            <a:r>
+              <a:rPr sz="2200" b="1" dirty="0" err="1">
+                <a:solidFill>
+                  <a:srgbClr val="222933"/>
+                </a:solidFill>
+                <a:latin typeface="맑은 고딕"/>
+              </a:rPr>
+              <a:t>일을</a:t>
+            </a:r>
+            <a:r>
+              <a:rPr sz="2200" b="1" dirty="0">
+                <a:solidFill>
+                  <a:srgbClr val="222933"/>
+                </a:solidFill>
+                <a:latin typeface="맑은 고딕"/>
+              </a:rPr>
+              <a:t> </a:t>
+            </a:r>
+            <a:r>
+              <a:rPr sz="2200" b="1" dirty="0" err="1">
+                <a:solidFill>
+                  <a:srgbClr val="222933"/>
+                </a:solidFill>
+                <a:latin typeface="맑은 고딕"/>
+              </a:rPr>
+              <a:t>처리</a:t>
+            </a:r>
+            <a:endParaRPr sz="2200" b="1" dirty="0">
+              <a:solidFill>
+                <a:srgbClr val="222933"/>
+              </a:solidFill>
+              <a:latin typeface="맑은 고딕"/>
+            </a:endParaRPr>
           </a:p>
           <a:p>
             <a:pPr>
@@ -5750,13 +6755,85 @@
               </a:spcAft>
             </a:pPr>
             <a:r>
-              <a:rPr sz="2200" b="1">
+              <a:rPr sz="2200" b="1" dirty="0">
                 <a:solidFill>
                   <a:srgbClr val="222933"/>
                 </a:solidFill>
                 <a:latin typeface="맑은 고딕"/>
               </a:rPr>
-              <a:t>•  조립(주입)은 한 곳에서: ChatServer(codec, rooms, connections)</a:t>
+              <a:t>•  </a:t>
+            </a:r>
+            <a:r>
+              <a:rPr sz="2200" b="1" dirty="0" err="1">
+                <a:solidFill>
+                  <a:srgbClr val="222933"/>
+                </a:solidFill>
+                <a:latin typeface="맑은 고딕"/>
+              </a:rPr>
+              <a:t>조립</a:t>
+            </a:r>
+            <a:r>
+              <a:rPr sz="2200" b="1" dirty="0">
+                <a:solidFill>
+                  <a:srgbClr val="222933"/>
+                </a:solidFill>
+                <a:latin typeface="맑은 고딕"/>
+              </a:rPr>
+              <a:t>(</a:t>
+            </a:r>
+            <a:r>
+              <a:rPr sz="2200" b="1" dirty="0" err="1">
+                <a:solidFill>
+                  <a:srgbClr val="222933"/>
+                </a:solidFill>
+                <a:latin typeface="맑은 고딕"/>
+              </a:rPr>
+              <a:t>주입</a:t>
+            </a:r>
+            <a:r>
+              <a:rPr sz="2200" b="1" dirty="0">
+                <a:solidFill>
+                  <a:srgbClr val="222933"/>
+                </a:solidFill>
+                <a:latin typeface="맑은 고딕"/>
+              </a:rPr>
+              <a:t>)은 한 </a:t>
+            </a:r>
+            <a:r>
+              <a:rPr sz="2200" b="1" dirty="0" err="1">
+                <a:solidFill>
+                  <a:srgbClr val="222933"/>
+                </a:solidFill>
+                <a:latin typeface="맑은 고딕"/>
+              </a:rPr>
+              <a:t>곳에서</a:t>
+            </a:r>
+            <a:r>
+              <a:rPr sz="2200" b="1" dirty="0">
+                <a:solidFill>
+                  <a:srgbClr val="222933"/>
+                </a:solidFill>
+                <a:latin typeface="맑은 고딕"/>
+              </a:rPr>
+              <a:t>: </a:t>
+            </a:r>
+            <a:r>
+              <a:rPr sz="2200" b="1" dirty="0" err="1">
+                <a:solidFill>
+                  <a:srgbClr val="222933"/>
+                </a:solidFill>
+                <a:latin typeface="맑은 고딕"/>
+              </a:rPr>
+              <a:t>ChatServer</a:t>
+            </a:r>
+            <a:r>
+              <a:rPr sz="2200" b="1" dirty="0">
+                <a:solidFill>
+                  <a:srgbClr val="222933"/>
+                </a:solidFill>
+                <a:latin typeface="맑은 고딕"/>
+              </a:rPr>
+              <a:t>(codec, rooms, connections)</a:t>
             </a:r>
           </a:p>
         </p:txBody>
@@ -9650,13 +10727,148 @@
               </a:spcAft>
             </a:pPr>
             <a:r>
-              <a:rPr sz="3400" b="1">
+              <a:rPr sz="3400" b="1" dirty="0" err="1">
                 <a:solidFill>
                   <a:srgbClr val="FFFFFF"/>
                 </a:solidFill>
                 <a:latin typeface="맑은 고딕"/>
               </a:rPr>
-              <a:t>설계가 좋으면, 기능 추가가 '수술'이 아니라 '끼우기'가 된다.</a:t>
+              <a:t>설계가</a:t>
+            </a:r>
+            <a:r>
+              <a:rPr sz="3400" b="1" dirty="0">
+                <a:solidFill>
+                  <a:srgbClr val="FFFFFF"/>
+                </a:solidFill>
+                <a:latin typeface="맑은 고딕"/>
+              </a:rPr>
+              <a:t> </a:t>
+            </a:r>
+            <a:r>
+              <a:rPr sz="3400" b="1" dirty="0" err="1">
+                <a:solidFill>
+                  <a:srgbClr val="FFFFFF"/>
+                </a:solidFill>
+                <a:latin typeface="맑은 고딕"/>
+              </a:rPr>
+              <a:t>좋으면</a:t>
+            </a:r>
+            <a:r>
+              <a:rPr sz="3400" b="1" dirty="0">
+                <a:solidFill>
+                  <a:srgbClr val="FFFFFF"/>
+                </a:solidFill>
+                <a:latin typeface="맑은 고딕"/>
+              </a:rPr>
+              <a:t>, </a:t>
+            </a:r>
+            <a:r>
+              <a:rPr sz="3400" b="1" dirty="0" err="1">
+                <a:solidFill>
+                  <a:srgbClr val="FFFFFF"/>
+                </a:solidFill>
+                <a:latin typeface="맑은 고딕"/>
+              </a:rPr>
+              <a:t>기능</a:t>
+            </a:r>
+            <a:r>
+              <a:rPr sz="3400" b="1" dirty="0">
+                <a:solidFill>
+                  <a:srgbClr val="FFFFFF"/>
+                </a:solidFill>
+                <a:latin typeface="맑은 고딕"/>
+              </a:rPr>
+              <a:t> </a:t>
+            </a:r>
+            <a:r>
+              <a:rPr sz="3400" b="1" dirty="0" err="1">
+                <a:solidFill>
+                  <a:srgbClr val="FFFFFF"/>
+                </a:solidFill>
+                <a:latin typeface="맑은 고딕"/>
+              </a:rPr>
+              <a:t>추가가</a:t>
+            </a:r>
+            <a:r>
+              <a:rPr sz="3400" b="1" dirty="0">
+                <a:solidFill>
+                  <a:srgbClr val="FFFFFF"/>
+                </a:solidFill>
+                <a:latin typeface="맑은 고딕"/>
+              </a:rPr>
+              <a:t> '</a:t>
+            </a:r>
+            <a:r>
+              <a:rPr sz="3400" b="1" dirty="0" err="1">
+                <a:solidFill>
+                  <a:srgbClr val="FFFFFF"/>
+                </a:solidFill>
+                <a:latin typeface="맑은 고딕"/>
+              </a:rPr>
+              <a:t>수술'이</a:t>
+            </a:r>
+            <a:r>
+              <a:rPr sz="3400" b="1" dirty="0">
+                <a:solidFill>
+                  <a:srgbClr val="FFFFFF"/>
+                </a:solidFill>
+                <a:latin typeface="맑은 고딕"/>
+              </a:rPr>
+              <a:t> </a:t>
+            </a:r>
+            <a:r>
+              <a:rPr sz="3400" b="1" dirty="0" err="1">
+                <a:solidFill>
+                  <a:srgbClr val="FFFFFF"/>
+                </a:solidFill>
+                <a:latin typeface="맑은 고딕"/>
+              </a:rPr>
+              <a:t>아니라</a:t>
+            </a:r>
+            <a:r>
+              <a:rPr sz="3400" b="1" dirty="0">
+                <a:solidFill>
+                  <a:srgbClr val="FFFFFF"/>
+                </a:solidFill>
+                <a:latin typeface="맑은 고딕"/>
+              </a:rPr>
+              <a:t> '</a:t>
+            </a:r>
+            <a:r>
+              <a:rPr sz="3400" b="1" dirty="0" err="1">
+                <a:solidFill>
+                  <a:srgbClr val="FFFFFF"/>
+                </a:solidFill>
+                <a:latin typeface="맑은 고딕"/>
+              </a:rPr>
+              <a:t>끼우기'가</a:t>
+            </a:r>
+            <a:r>
+              <a:rPr sz="3400" b="1" dirty="0">
+                <a:solidFill>
+                  <a:srgbClr val="FFFFFF"/>
+                </a:solidFill>
+                <a:latin typeface="맑은 고딕"/>
+              </a:rPr>
+              <a:t> </a:t>
+            </a:r>
+            <a:r>
+              <a:rPr sz="3400" b="1" dirty="0" err="1">
+                <a:solidFill>
+                  <a:srgbClr val="FFFFFF"/>
+                </a:solidFill>
+                <a:latin typeface="맑은 고딕"/>
+              </a:rPr>
+              <a:t>된다</a:t>
+            </a:r>
+            <a:r>
+              <a:rPr sz="3400" b="1" dirty="0">
+                <a:solidFill>
+                  <a:srgbClr val="FFFFFF"/>
+                </a:solidFill>
+                <a:latin typeface="맑은 고딕"/>
+              </a:rPr>
+              <a:t>.</a:t>
             </a:r>
           </a:p>
         </p:txBody>
@@ -9692,13 +10904,103 @@
               </a:spcAft>
             </a:pPr>
             <a:r>
-              <a:rPr sz="2000" b="0">
+              <a:rPr sz="2000" b="0" dirty="0">
                 <a:solidFill>
                   <a:srgbClr val="C7D3E0"/>
                 </a:solidFill>
                 <a:latin typeface="맑은 고딕"/>
               </a:rPr>
-              <a:t>•  한 객체는 한 가지 일만 (단일 책임)</a:t>
+              <a:t>•  한 </a:t>
+            </a:r>
+            <a:r>
+              <a:rPr sz="2000" b="0" dirty="0" err="1">
+                <a:solidFill>
+                  <a:srgbClr val="C7D3E0"/>
+                </a:solidFill>
+                <a:latin typeface="맑은 고딕"/>
+              </a:rPr>
+              <a:t>객체는</a:t>
+            </a:r>
+            <a:r>
+              <a:rPr sz="2000" b="0" dirty="0">
+                <a:solidFill>
+                  <a:srgbClr val="C7D3E0"/>
+                </a:solidFill>
+                <a:latin typeface="맑은 고딕"/>
+              </a:rPr>
+              <a:t> 한 </a:t>
+            </a:r>
+            <a:r>
+              <a:rPr sz="2000" b="0" dirty="0" err="1">
+                <a:solidFill>
+                  <a:srgbClr val="C7D3E0"/>
+                </a:solidFill>
+                <a:latin typeface="맑은 고딕"/>
+              </a:rPr>
+              <a:t>가지</a:t>
+            </a:r>
+            <a:r>
+              <a:rPr sz="2000" b="0" dirty="0">
+                <a:solidFill>
+                  <a:srgbClr val="C7D3E0"/>
+                </a:solidFill>
+                <a:latin typeface="맑은 고딕"/>
+              </a:rPr>
+              <a:t> </a:t>
+            </a:r>
+            <a:r>
+              <a:rPr sz="2000" b="0" dirty="0" err="1">
+                <a:solidFill>
+                  <a:srgbClr val="C7D3E0"/>
+                </a:solidFill>
+                <a:latin typeface="맑은 고딕"/>
+              </a:rPr>
+              <a:t>일만</a:t>
+            </a:r>
+            <a:r>
+              <a:rPr sz="2000" b="0" dirty="0">
+                <a:solidFill>
+                  <a:srgbClr val="C7D3E0"/>
+                </a:solidFill>
+                <a:latin typeface="맑은 고딕"/>
+              </a:rPr>
+              <a:t> (</a:t>
+            </a:r>
+            <a:r>
+              <a:rPr sz="2000" b="0" dirty="0" err="1">
+                <a:solidFill>
+                  <a:srgbClr val="C7D3E0"/>
+                </a:solidFill>
+                <a:latin typeface="맑은 고딕"/>
+              </a:rPr>
+              <a:t>단일</a:t>
+            </a:r>
+            <a:r>
+              <a:rPr sz="2000" b="0" dirty="0">
+                <a:solidFill>
+                  <a:srgbClr val="C7D3E0"/>
+                </a:solidFill>
+                <a:latin typeface="맑은 고딕"/>
+              </a:rPr>
+              <a:t> </a:t>
+            </a:r>
+            <a:r>
+              <a:rPr sz="2000" b="0" dirty="0" err="1">
+                <a:solidFill>
+                  <a:srgbClr val="C7D3E0"/>
+                </a:solidFill>
+                <a:latin typeface="맑은 고딕"/>
+              </a:rPr>
+              <a:t>책임</a:t>
+            </a:r>
+            <a:r>
+              <a:rPr sz="2000" b="0" dirty="0">
+                <a:solidFill>
+                  <a:srgbClr val="C7D3E0"/>
+                </a:solidFill>
+                <a:latin typeface="맑은 고딕"/>
+              </a:rPr>
+              <a:t>)</a:t>
             </a:r>
           </a:p>
           <a:p>
@@ -9711,13 +11013,103 @@
               </a:spcAft>
             </a:pPr>
             <a:r>
-              <a:rPr sz="2000" b="0">
+              <a:rPr sz="2000" b="0" dirty="0">
                 <a:solidFill>
                   <a:srgbClr val="C7D3E0"/>
                 </a:solidFill>
                 <a:latin typeface="맑은 고딕"/>
               </a:rPr>
-              <a:t>•  ChatServer 는 조립·지휘, 일은 부품이 (협력)</a:t>
+              <a:t>•  </a:t>
+            </a:r>
+            <a:r>
+              <a:rPr sz="2000" b="0" dirty="0" err="1">
+                <a:solidFill>
+                  <a:srgbClr val="C7D3E0"/>
+                </a:solidFill>
+                <a:latin typeface="맑은 고딕"/>
+              </a:rPr>
+              <a:t>ChatServer</a:t>
+            </a:r>
+            <a:r>
+              <a:rPr sz="2000" b="0" dirty="0">
+                <a:solidFill>
+                  <a:srgbClr val="C7D3E0"/>
+                </a:solidFill>
+                <a:latin typeface="맑은 고딕"/>
+              </a:rPr>
+              <a:t> 는 </a:t>
+            </a:r>
+            <a:r>
+              <a:rPr sz="2000" b="0" dirty="0" err="1">
+                <a:solidFill>
+                  <a:srgbClr val="C7D3E0"/>
+                </a:solidFill>
+                <a:latin typeface="맑은 고딕"/>
+              </a:rPr>
+              <a:t>조립·지휘</a:t>
+            </a:r>
+            <a:r>
+              <a:rPr sz="2000" b="0" dirty="0">
+                <a:solidFill>
+                  <a:srgbClr val="C7D3E0"/>
+                </a:solidFill>
+                <a:latin typeface="맑은 고딕"/>
+              </a:rPr>
+              <a:t>, </a:t>
+            </a:r>
+            <a:r>
+              <a:rPr sz="2000" b="0" dirty="0" err="1">
+                <a:solidFill>
+                  <a:srgbClr val="C7D3E0"/>
+                </a:solidFill>
+                <a:latin typeface="맑은 고딕"/>
+              </a:rPr>
+              <a:t>일은</a:t>
+            </a:r>
+            <a:r>
+              <a:rPr sz="2000" b="0" dirty="0">
+                <a:solidFill>
+                  <a:srgbClr val="C7D3E0"/>
+                </a:solidFill>
+                <a:latin typeface="맑은 고딕"/>
+              </a:rPr>
+              <a:t> </a:t>
+            </a:r>
+            <a:r>
+              <a:rPr sz="2000" b="0" dirty="0" err="1">
+                <a:solidFill>
+                  <a:srgbClr val="C7D3E0"/>
+                </a:solidFill>
+                <a:latin typeface="맑은 고딕"/>
+              </a:rPr>
+              <a:t>부품이</a:t>
+            </a:r>
+            <a:r>
+              <a:rPr sz="2000" b="0" dirty="0">
+                <a:solidFill>
+                  <a:srgbClr val="C7D3E0"/>
+                </a:solidFill>
+                <a:latin typeface="맑은 고딕"/>
+              </a:rPr>
+              <a:t> (</a:t>
+            </a:r>
+            <a:r>
+              <a:rPr sz="2000" b="0" dirty="0" err="1">
+                <a:solidFill>
+                  <a:srgbClr val="C7D3E0"/>
+                </a:solidFill>
+                <a:latin typeface="맑은 고딕"/>
+              </a:rPr>
+              <a:t>협력</a:t>
+            </a:r>
+            <a:r>
+              <a:rPr sz="2000" b="0" dirty="0">
+                <a:solidFill>
+                  <a:srgbClr val="C7D3E0"/>
+                </a:solidFill>
+                <a:latin typeface="맑은 고딕"/>
+              </a:rPr>
+              <a:t>)</a:t>
             </a:r>
           </a:p>
           <a:p>
@@ -9730,14 +11122,119 @@
               </a:spcAft>
             </a:pPr>
             <a:r>
-              <a:rPr sz="2000" b="0">
+              <a:rPr sz="2000" b="0" dirty="0">
                 <a:solidFill>
                   <a:srgbClr val="C7D3E0"/>
                 </a:solidFill>
                 <a:latin typeface="맑은 고딕"/>
               </a:rPr>
-              <a:t>•  새 명령 = 표에 한 줄 + 메서드 하나, 본체는 그대로</a:t>
-            </a:r>
+              <a:t>•  새 </a:t>
+            </a:r>
+            <a:r>
+              <a:rPr sz="2000" b="0" dirty="0" err="1">
+                <a:solidFill>
+                  <a:srgbClr val="C7D3E0"/>
+                </a:solidFill>
+                <a:latin typeface="맑은 고딕"/>
+              </a:rPr>
+              <a:t>명령</a:t>
+            </a:r>
+            <a:r>
+              <a:rPr sz="2000" b="0" dirty="0">
+                <a:solidFill>
+                  <a:srgbClr val="C7D3E0"/>
+                </a:solidFill>
+                <a:latin typeface="맑은 고딕"/>
+              </a:rPr>
+              <a:t> = </a:t>
+            </a:r>
+            <a:r>
+              <a:rPr sz="2000" b="0" dirty="0" err="1">
+                <a:solidFill>
+                  <a:srgbClr val="C7D3E0"/>
+                </a:solidFill>
+                <a:latin typeface="맑은 고딕"/>
+              </a:rPr>
+              <a:t>표에</a:t>
+            </a:r>
+            <a:r>
+              <a:rPr sz="2000" b="0" dirty="0">
+                <a:solidFill>
+                  <a:srgbClr val="C7D3E0"/>
+                </a:solidFill>
+                <a:latin typeface="맑은 고딕"/>
+              </a:rPr>
+              <a:t> 한 줄 + </a:t>
+            </a:r>
+            <a:r>
+              <a:rPr sz="2000" b="0" dirty="0" err="1">
+                <a:solidFill>
+                  <a:srgbClr val="C7D3E0"/>
+                </a:solidFill>
+                <a:latin typeface="맑은 고딕"/>
+              </a:rPr>
+              <a:t>메서드</a:t>
+            </a:r>
+            <a:r>
+              <a:rPr sz="2000" b="0" dirty="0">
+                <a:solidFill>
+                  <a:srgbClr val="C7D3E0"/>
+                </a:solidFill>
+                <a:latin typeface="맑은 고딕"/>
+              </a:rPr>
+              <a:t> </a:t>
+            </a:r>
+            <a:r>
+              <a:rPr sz="2000" b="0" dirty="0" err="1">
+                <a:solidFill>
+                  <a:srgbClr val="C7D3E0"/>
+                </a:solidFill>
+                <a:latin typeface="맑은 고딕"/>
+              </a:rPr>
+              <a:t>하나</a:t>
+            </a:r>
+            <a:r>
+              <a:rPr sz="2000" b="0" dirty="0">
+                <a:solidFill>
+                  <a:srgbClr val="C7D3E0"/>
+                </a:solidFill>
+                <a:latin typeface="맑은 고딕"/>
+              </a:rPr>
+              <a:t>, </a:t>
+            </a:r>
+            <a:r>
+              <a:rPr sz="2000" b="0" dirty="0" err="1">
+                <a:solidFill>
+                  <a:srgbClr val="C7D3E0"/>
+                </a:solidFill>
+                <a:latin typeface="맑은 고딕"/>
+              </a:rPr>
+              <a:t>본체는</a:t>
+            </a:r>
+            <a:r>
+              <a:rPr sz="2000" b="0" dirty="0">
+                <a:solidFill>
+                  <a:srgbClr val="C7D3E0"/>
+                </a:solidFill>
+                <a:latin typeface="맑은 고딕"/>
+              </a:rPr>
+              <a:t> </a:t>
+            </a:r>
+            <a:r>
+              <a:rPr sz="2000" b="0" dirty="0" err="1">
+                <a:solidFill>
+                  <a:srgbClr val="C7D3E0"/>
+                </a:solidFill>
+                <a:latin typeface="맑은 고딕"/>
+              </a:rPr>
+              <a:t>그대로</a:t>
+            </a:r>
+            <a:endParaRPr sz="2000" b="0" dirty="0">
+              <a:solidFill>
+                <a:srgbClr val="C7D3E0"/>
+              </a:solidFill>
+              <a:latin typeface="맑은 고딕"/>
+            </a:endParaRPr>
           </a:p>
           <a:p>
             <a:pPr>
@@ -9749,14 +11246,137 @@
               </a:spcAft>
             </a:pPr>
             <a:r>
-              <a:rPr sz="2000" b="0">
+              <a:rPr sz="2000" b="0" dirty="0">
                 <a:solidFill>
                   <a:srgbClr val="C7D3E0"/>
                 </a:solidFill>
                 <a:latin typeface="맑은 고딕"/>
               </a:rPr>
-              <a:t>•  다음 단계: 같은 서버에 화면(GUI)·웹 클라이언트를 붙인다</a:t>
-            </a:r>
+              <a:t>•  </a:t>
+            </a:r>
+            <a:r>
+              <a:rPr sz="2000" b="0" dirty="0" err="1">
+                <a:solidFill>
+                  <a:srgbClr val="C7D3E0"/>
+                </a:solidFill>
+                <a:latin typeface="맑은 고딕"/>
+              </a:rPr>
+              <a:t>다음</a:t>
+            </a:r>
+            <a:r>
+              <a:rPr sz="2000" b="0" dirty="0">
+                <a:solidFill>
+                  <a:srgbClr val="C7D3E0"/>
+                </a:solidFill>
+                <a:latin typeface="맑은 고딕"/>
+              </a:rPr>
+              <a:t> </a:t>
+            </a:r>
+            <a:r>
+              <a:rPr sz="2000" b="0" dirty="0" err="1">
+                <a:solidFill>
+                  <a:srgbClr val="C7D3E0"/>
+                </a:solidFill>
+                <a:latin typeface="맑은 고딕"/>
+              </a:rPr>
+              <a:t>단계</a:t>
+            </a:r>
+            <a:r>
+              <a:rPr sz="2000" b="0" dirty="0">
+                <a:solidFill>
+                  <a:srgbClr val="C7D3E0"/>
+                </a:solidFill>
+                <a:latin typeface="맑은 고딕"/>
+              </a:rPr>
+              <a:t>: </a:t>
+            </a:r>
+            <a:r>
+              <a:rPr sz="2000" b="0" dirty="0" err="1">
+                <a:solidFill>
+                  <a:srgbClr val="C7D3E0"/>
+                </a:solidFill>
+                <a:latin typeface="맑은 고딕"/>
+              </a:rPr>
+              <a:t>같은</a:t>
+            </a:r>
+            <a:r>
+              <a:rPr sz="2000" b="0" dirty="0">
+                <a:solidFill>
+                  <a:srgbClr val="C7D3E0"/>
+                </a:solidFill>
+                <a:latin typeface="맑은 고딕"/>
+              </a:rPr>
+              <a:t> </a:t>
+            </a:r>
+            <a:r>
+              <a:rPr sz="2000" b="0" dirty="0" err="1">
+                <a:solidFill>
+                  <a:srgbClr val="C7D3E0"/>
+                </a:solidFill>
+                <a:latin typeface="맑은 고딕"/>
+              </a:rPr>
+              <a:t>서버에</a:t>
+            </a:r>
+            <a:r>
+              <a:rPr sz="2000" b="0" dirty="0">
+                <a:solidFill>
+                  <a:srgbClr val="C7D3E0"/>
+                </a:solidFill>
+                <a:latin typeface="맑은 고딕"/>
+              </a:rPr>
+              <a:t> </a:t>
+            </a:r>
+            <a:r>
+              <a:rPr sz="2000" b="0" dirty="0" err="1">
+                <a:solidFill>
+                  <a:srgbClr val="C7D3E0"/>
+                </a:solidFill>
+                <a:latin typeface="맑은 고딕"/>
+              </a:rPr>
+              <a:t>화면</a:t>
+            </a:r>
+            <a:r>
+              <a:rPr sz="2000" b="0" dirty="0">
+                <a:solidFill>
+                  <a:srgbClr val="C7D3E0"/>
+                </a:solidFill>
+                <a:latin typeface="맑은 고딕"/>
+              </a:rPr>
+              <a:t>(GUI)·웹 </a:t>
+            </a:r>
+            <a:r>
+              <a:rPr sz="2000" b="0" dirty="0" err="1">
+                <a:solidFill>
+                  <a:srgbClr val="C7D3E0"/>
+                </a:solidFill>
+                <a:latin typeface="맑은 고딕"/>
+              </a:rPr>
+              <a:t>클라이언트를</a:t>
+            </a:r>
+            <a:r>
+              <a:rPr sz="2000" b="0" dirty="0">
+                <a:solidFill>
+                  <a:srgbClr val="C7D3E0"/>
+                </a:solidFill>
+                <a:latin typeface="맑은 고딕"/>
+              </a:rPr>
+              <a:t> </a:t>
+            </a:r>
+            <a:r>
+              <a:rPr sz="2000" b="0" dirty="0" err="1">
+                <a:solidFill>
+                  <a:srgbClr val="C7D3E0"/>
+                </a:solidFill>
+                <a:latin typeface="맑은 고딕"/>
+              </a:rPr>
+              <a:t>붙인다</a:t>
+            </a:r>
+            <a:endParaRPr sz="2000" b="0" dirty="0">
+              <a:solidFill>
+                <a:srgbClr val="C7D3E0"/>
+              </a:solidFill>
+              <a:latin typeface="맑은 고딕"/>
+            </a:endParaRPr>
           </a:p>
         </p:txBody>
       </p:sp>
